--- a/semaine_09/420905_semaine9.pptx
+++ b/semaine_09/420905_semaine9.pptx
@@ -3598,20 +3598,17 @@
             </a:r>
             <a:r>
               <a:rPr lang="fr-CA"/>
-              <a:t>convertir les valeurs obtenues </a:t>
-            </a:r>
-            <a:r>
-              <a:rPr lang="fr-CA" dirty="0"/>
-              <a:t>en </a:t>
-            </a:r>
-            <a:r>
-              <a:rPr lang="fr-CA" b="1" dirty="0"/>
-              <a:t>nombre</a:t>
-            </a:r>
-            <a:r>
-              <a:rPr lang="fr-CA" dirty="0"/>
+              <a:t>convertir les valeurs obtenues en </a:t>
+            </a:r>
+            <a:r>
+              <a:rPr lang="fr-CA" b="1"/>
+              <a:t>nombres</a:t>
+            </a:r>
+            <a:r>
+              <a:rPr lang="fr-CA"/>
               <a:t>.</a:t>
             </a:r>
+            <a:endParaRPr lang="fr-CA" dirty="0"/>
           </a:p>
         </p:txBody>
       </p:sp>
@@ -6310,7 +6307,7 @@
             </a:r>
             <a:r>
               <a:rPr lang="fr-CA"/>
-              <a:t>il ajouter </a:t>
+              <a:t>il faut ajouter </a:t>
             </a:r>
             <a:r>
               <a:rPr lang="fr-CA" dirty="0"/>
@@ -9904,19 +9901,7 @@
             </a:r>
             <a:r>
               <a:rPr lang="fr-CA"/>
-              <a:t> : Augmenter / réduire la valeur numérique et remettre le </a:t>
-            </a:r>
-            <a:r>
-              <a:rPr lang="fr-CA">
-                <a:solidFill>
-                  <a:srgbClr val="C00000"/>
-                </a:solidFill>
-              </a:rPr>
-              <a:t>"px"</a:t>
-            </a:r>
-            <a:r>
-              <a:rPr lang="fr-CA"/>
-              <a:t> à la fin</a:t>
+              <a:t> : Augmenter / réduire la valeur numérique</a:t>
             </a:r>
           </a:p>
           <a:p>
@@ -9955,7 +9940,19 @@
             </a:r>
             <a:r>
               <a:rPr lang="fr-CA"/>
-              <a:t> de l’élément avec la nouvelle valeur </a:t>
+              <a:t> de l’élément avec la nouvelle valeur sans oublier de remettre le </a:t>
+            </a:r>
+            <a:r>
+              <a:rPr lang="fr-CA">
+                <a:solidFill>
+                  <a:srgbClr val="C00000"/>
+                </a:solidFill>
+              </a:rPr>
+              <a:t>"px" </a:t>
+            </a:r>
+            <a:r>
+              <a:rPr lang="fr-CA"/>
+              <a:t>après le nombre !</a:t>
             </a:r>
           </a:p>
         </p:txBody>
@@ -10048,12 +10045,135 @@
           </a:prstGeom>
         </p:spPr>
       </p:pic>
+      <p:cxnSp>
+        <p:nvCxnSpPr>
+          <p:cNvPr id="15" name="Connecteur droit 14">
+            <a:extLst>
+              <a:ext uri="{FF2B5EF4-FFF2-40B4-BE49-F238E27FC236}">
+                <a16:creationId xmlns:a16="http://schemas.microsoft.com/office/drawing/2014/main" id="{7144C767-80FD-4C58-8341-F455BC2DCD13}"/>
+              </a:ext>
+            </a:extLst>
+          </p:cNvPr>
+          <p:cNvCxnSpPr/>
+          <p:nvPr/>
+        </p:nvCxnSpPr>
+        <p:spPr>
+          <a:xfrm>
+            <a:off x="999744" y="3307609"/>
+            <a:ext cx="10479024" cy="0"/>
+          </a:xfrm>
+          <a:prstGeom prst="line">
+            <a:avLst/>
+          </a:prstGeom>
+          <a:ln w="12700">
+            <a:solidFill>
+              <a:srgbClr val="7385D1"/>
+            </a:solidFill>
+          </a:ln>
+        </p:spPr>
+        <p:style>
+          <a:lnRef idx="1">
+            <a:schemeClr val="accent1"/>
+          </a:lnRef>
+          <a:fillRef idx="0">
+            <a:schemeClr val="accent1"/>
+          </a:fillRef>
+          <a:effectRef idx="0">
+            <a:schemeClr val="accent1"/>
+          </a:effectRef>
+          <a:fontRef idx="minor">
+            <a:schemeClr val="tx1"/>
+          </a:fontRef>
+        </p:style>
+      </p:cxnSp>
+      <p:cxnSp>
+        <p:nvCxnSpPr>
+          <p:cNvPr id="16" name="Connecteur droit 15">
+            <a:extLst>
+              <a:ext uri="{FF2B5EF4-FFF2-40B4-BE49-F238E27FC236}">
+                <a16:creationId xmlns:a16="http://schemas.microsoft.com/office/drawing/2014/main" id="{975408D4-705A-4CAB-99A4-D8D628C29E0A}"/>
+              </a:ext>
+            </a:extLst>
+          </p:cNvPr>
+          <p:cNvCxnSpPr/>
+          <p:nvPr/>
+        </p:nvCxnSpPr>
+        <p:spPr>
+          <a:xfrm>
+            <a:off x="999744" y="4295161"/>
+            <a:ext cx="10479024" cy="0"/>
+          </a:xfrm>
+          <a:prstGeom prst="line">
+            <a:avLst/>
+          </a:prstGeom>
+          <a:ln w="12700">
+            <a:solidFill>
+              <a:srgbClr val="7385D1"/>
+            </a:solidFill>
+          </a:ln>
+        </p:spPr>
+        <p:style>
+          <a:lnRef idx="1">
+            <a:schemeClr val="accent1"/>
+          </a:lnRef>
+          <a:fillRef idx="0">
+            <a:schemeClr val="accent1"/>
+          </a:fillRef>
+          <a:effectRef idx="0">
+            <a:schemeClr val="accent1"/>
+          </a:effectRef>
+          <a:fontRef idx="minor">
+            <a:schemeClr val="tx1"/>
+          </a:fontRef>
+        </p:style>
+      </p:cxnSp>
+      <p:cxnSp>
+        <p:nvCxnSpPr>
+          <p:cNvPr id="17" name="Connecteur droit 16">
+            <a:extLst>
+              <a:ext uri="{FF2B5EF4-FFF2-40B4-BE49-F238E27FC236}">
+                <a16:creationId xmlns:a16="http://schemas.microsoft.com/office/drawing/2014/main" id="{4DFECD6A-58D8-48E8-AE32-35951200934D}"/>
+              </a:ext>
+            </a:extLst>
+          </p:cNvPr>
+          <p:cNvCxnSpPr/>
+          <p:nvPr/>
+        </p:nvCxnSpPr>
+        <p:spPr>
+          <a:xfrm>
+            <a:off x="1021074" y="5325385"/>
+            <a:ext cx="10479024" cy="0"/>
+          </a:xfrm>
+          <a:prstGeom prst="line">
+            <a:avLst/>
+          </a:prstGeom>
+          <a:ln w="12700">
+            <a:solidFill>
+              <a:srgbClr val="7385D1"/>
+            </a:solidFill>
+          </a:ln>
+        </p:spPr>
+        <p:style>
+          <a:lnRef idx="1">
+            <a:schemeClr val="accent1"/>
+          </a:lnRef>
+          <a:fillRef idx="0">
+            <a:schemeClr val="accent1"/>
+          </a:fillRef>
+          <a:effectRef idx="0">
+            <a:schemeClr val="accent1"/>
+          </a:effectRef>
+          <a:fontRef idx="minor">
+            <a:schemeClr val="tx1"/>
+          </a:fontRef>
+        </p:style>
+      </p:cxnSp>
       <p:pic>
         <p:nvPicPr>
-          <p:cNvPr id="11" name="Image 10">
-            <a:extLst>
-              <a:ext uri="{FF2B5EF4-FFF2-40B4-BE49-F238E27FC236}">
-                <a16:creationId xmlns:a16="http://schemas.microsoft.com/office/drawing/2014/main" id="{A1E5673E-8B93-4164-A97E-046EC02D40B5}"/>
+          <p:cNvPr id="6" name="Image 5">
+            <a:extLst>
+              <a:ext uri="{FF2B5EF4-FFF2-40B4-BE49-F238E27FC236}">
+                <a16:creationId xmlns:a16="http://schemas.microsoft.com/office/drawing/2014/main" id="{BB7EFF55-6BDF-414A-982E-F0B628F926F0}"/>
               </a:ext>
             </a:extLst>
           </p:cNvPr>
@@ -10070,8 +10190,8 @@
         </p:blipFill>
         <p:spPr>
           <a:xfrm>
-            <a:off x="2411949" y="4952668"/>
-            <a:ext cx="6171219" cy="302601"/>
+            <a:off x="2411949" y="4785278"/>
+            <a:ext cx="3610479" cy="447737"/>
           </a:xfrm>
           <a:prstGeom prst="rect">
             <a:avLst/>
@@ -10080,10 +10200,10 @@
       </p:pic>
       <p:pic>
         <p:nvPicPr>
-          <p:cNvPr id="13" name="Image 12">
-            <a:extLst>
-              <a:ext uri="{FF2B5EF4-FFF2-40B4-BE49-F238E27FC236}">
-                <a16:creationId xmlns:a16="http://schemas.microsoft.com/office/drawing/2014/main" id="{A2FDF331-1026-4143-BEDC-1E019BF7E208}"/>
+          <p:cNvPr id="12" name="Image 11">
+            <a:extLst>
+              <a:ext uri="{FF2B5EF4-FFF2-40B4-BE49-F238E27FC236}">
+                <a16:creationId xmlns:a16="http://schemas.microsoft.com/office/drawing/2014/main" id="{072A24F0-3A92-406E-8F10-CF3C58E16B47}"/>
               </a:ext>
             </a:extLst>
           </p:cNvPr>
@@ -10100,137 +10220,14 @@
         </p:blipFill>
         <p:spPr>
           <a:xfrm>
-            <a:off x="2411949" y="5843635"/>
-            <a:ext cx="7697274" cy="352474"/>
+            <a:off x="1545287" y="6109591"/>
+            <a:ext cx="9697803" cy="390580"/>
           </a:xfrm>
           <a:prstGeom prst="rect">
             <a:avLst/>
           </a:prstGeom>
         </p:spPr>
       </p:pic>
-      <p:cxnSp>
-        <p:nvCxnSpPr>
-          <p:cNvPr id="15" name="Connecteur droit 14">
-            <a:extLst>
-              <a:ext uri="{FF2B5EF4-FFF2-40B4-BE49-F238E27FC236}">
-                <a16:creationId xmlns:a16="http://schemas.microsoft.com/office/drawing/2014/main" id="{7144C767-80FD-4C58-8341-F455BC2DCD13}"/>
-              </a:ext>
-            </a:extLst>
-          </p:cNvPr>
-          <p:cNvCxnSpPr/>
-          <p:nvPr/>
-        </p:nvCxnSpPr>
-        <p:spPr>
-          <a:xfrm>
-            <a:off x="999744" y="3307609"/>
-            <a:ext cx="10479024" cy="0"/>
-          </a:xfrm>
-          <a:prstGeom prst="line">
-            <a:avLst/>
-          </a:prstGeom>
-          <a:ln w="12700">
-            <a:solidFill>
-              <a:srgbClr val="7385D1"/>
-            </a:solidFill>
-          </a:ln>
-        </p:spPr>
-        <p:style>
-          <a:lnRef idx="1">
-            <a:schemeClr val="accent1"/>
-          </a:lnRef>
-          <a:fillRef idx="0">
-            <a:schemeClr val="accent1"/>
-          </a:fillRef>
-          <a:effectRef idx="0">
-            <a:schemeClr val="accent1"/>
-          </a:effectRef>
-          <a:fontRef idx="minor">
-            <a:schemeClr val="tx1"/>
-          </a:fontRef>
-        </p:style>
-      </p:cxnSp>
-      <p:cxnSp>
-        <p:nvCxnSpPr>
-          <p:cNvPr id="16" name="Connecteur droit 15">
-            <a:extLst>
-              <a:ext uri="{FF2B5EF4-FFF2-40B4-BE49-F238E27FC236}">
-                <a16:creationId xmlns:a16="http://schemas.microsoft.com/office/drawing/2014/main" id="{975408D4-705A-4CAB-99A4-D8D628C29E0A}"/>
-              </a:ext>
-            </a:extLst>
-          </p:cNvPr>
-          <p:cNvCxnSpPr/>
-          <p:nvPr/>
-        </p:nvCxnSpPr>
-        <p:spPr>
-          <a:xfrm>
-            <a:off x="999744" y="4295161"/>
-            <a:ext cx="10479024" cy="0"/>
-          </a:xfrm>
-          <a:prstGeom prst="line">
-            <a:avLst/>
-          </a:prstGeom>
-          <a:ln w="12700">
-            <a:solidFill>
-              <a:srgbClr val="7385D1"/>
-            </a:solidFill>
-          </a:ln>
-        </p:spPr>
-        <p:style>
-          <a:lnRef idx="1">
-            <a:schemeClr val="accent1"/>
-          </a:lnRef>
-          <a:fillRef idx="0">
-            <a:schemeClr val="accent1"/>
-          </a:fillRef>
-          <a:effectRef idx="0">
-            <a:schemeClr val="accent1"/>
-          </a:effectRef>
-          <a:fontRef idx="minor">
-            <a:schemeClr val="tx1"/>
-          </a:fontRef>
-        </p:style>
-      </p:cxnSp>
-      <p:cxnSp>
-        <p:nvCxnSpPr>
-          <p:cNvPr id="17" name="Connecteur droit 16">
-            <a:extLst>
-              <a:ext uri="{FF2B5EF4-FFF2-40B4-BE49-F238E27FC236}">
-                <a16:creationId xmlns:a16="http://schemas.microsoft.com/office/drawing/2014/main" id="{4DFECD6A-58D8-48E8-AE32-35951200934D}"/>
-              </a:ext>
-            </a:extLst>
-          </p:cNvPr>
-          <p:cNvCxnSpPr/>
-          <p:nvPr/>
-        </p:nvCxnSpPr>
-        <p:spPr>
-          <a:xfrm>
-            <a:off x="1021074" y="5325385"/>
-            <a:ext cx="10479024" cy="0"/>
-          </a:xfrm>
-          <a:prstGeom prst="line">
-            <a:avLst/>
-          </a:prstGeom>
-          <a:ln w="12700">
-            <a:solidFill>
-              <a:srgbClr val="7385D1"/>
-            </a:solidFill>
-          </a:ln>
-        </p:spPr>
-        <p:style>
-          <a:lnRef idx="1">
-            <a:schemeClr val="accent1"/>
-          </a:lnRef>
-          <a:fillRef idx="0">
-            <a:schemeClr val="accent1"/>
-          </a:fillRef>
-          <a:effectRef idx="0">
-            <a:schemeClr val="accent1"/>
-          </a:effectRef>
-          <a:fontRef idx="minor">
-            <a:schemeClr val="tx1"/>
-          </a:fontRef>
-        </p:style>
-      </p:cxnSp>
     </p:spTree>
     <p:extLst>
       <p:ext uri="{BB962C8B-B14F-4D97-AF65-F5344CB8AC3E}">
@@ -13945,7 +13942,23 @@
                   <a:srgbClr val="73B3D1"/>
                 </a:solidFill>
               </a:rPr>
-              <a:t>Cette fonction est appelée lorsqu’un clique </a:t>
+              <a:t>Cette fonction est </a:t>
+            </a:r>
+            <a:r>
+              <a:rPr lang="fr-CA">
+                <a:solidFill>
+                  <a:srgbClr val="73B3D1"/>
+                </a:solidFill>
+              </a:rPr>
+              <a:t>appelée lorsqu’on </a:t>
+            </a:r>
+            <a:r>
+              <a:rPr lang="fr-CA" dirty="0">
+                <a:solidFill>
+                  <a:srgbClr val="73B3D1"/>
+                </a:solidFill>
+              </a:rPr>
+              <a:t>clique </a:t>
             </a:r>
             <a:r>
               <a:rPr lang="fr-CA">
@@ -14400,7 +14413,23 @@
                   <a:srgbClr val="73B3D1"/>
                 </a:solidFill>
               </a:rPr>
-              <a:t>Cette fonction est appelée lorsqu’un clique </a:t>
+              <a:t>Cette fonction est </a:t>
+            </a:r>
+            <a:r>
+              <a:rPr lang="fr-CA">
+                <a:solidFill>
+                  <a:srgbClr val="73B3D1"/>
+                </a:solidFill>
+              </a:rPr>
+              <a:t>appelée lorsqu’on </a:t>
+            </a:r>
+            <a:r>
+              <a:rPr lang="fr-CA" dirty="0">
+                <a:solidFill>
+                  <a:srgbClr val="73B3D1"/>
+                </a:solidFill>
+              </a:rPr>
+              <a:t>clique </a:t>
             </a:r>
             <a:r>
               <a:rPr lang="fr-CA">
@@ -15062,12 +15091,6 @@
 </file>
 
 <file path=customXml/item2.xml><?xml version="1.0" encoding="utf-8"?>
-<p:properties xmlns:p="http://schemas.microsoft.com/office/2006/metadata/properties" xmlns:xsi="http://www.w3.org/2001/XMLSchema-instance" xmlns:pc="http://schemas.microsoft.com/office/infopath/2007/PartnerControls">
-  <documentManagement/>
-</p:properties>
-</file>
-
-<file path=customXml/item3.xml><?xml version="1.0" encoding="utf-8"?>
 <ct:contentTypeSchema xmlns:ct="http://schemas.microsoft.com/office/2006/metadata/contentType" xmlns:ma="http://schemas.microsoft.com/office/2006/metadata/properties/metaAttributes" ct:_="" ma:_="" ma:contentTypeName="Document" ma:contentTypeID="0x01010062E8CCA7FB9EAE4D9797B5C1381037FC" ma:contentTypeVersion="9" ma:contentTypeDescription="Create a new document." ma:contentTypeScope="" ma:versionID="020e06b287671e86e91b3e1b12ab4816">
   <xsd:schema xmlns:xsd="http://www.w3.org/2001/XMLSchema" xmlns:xs="http://www.w3.org/2001/XMLSchema" xmlns:p="http://schemas.microsoft.com/office/2006/metadata/properties" xmlns:ns2="83ab252c-4429-4d3c-b354-a26bac7f17c4" targetNamespace="http://schemas.microsoft.com/office/2006/metadata/properties" ma:root="true" ma:fieldsID="a7531f0ded98428dc5aa0cd72d251711" ns2:_="">
     <xsd:import namespace="83ab252c-4429-4d3c-b354-a26bac7f17c4"/>
@@ -15245,6 +15268,12 @@
 </ct:contentTypeSchema>
 </file>
 
+<file path=customXml/item3.xml><?xml version="1.0" encoding="utf-8"?>
+<p:properties xmlns:p="http://schemas.microsoft.com/office/2006/metadata/properties" xmlns:xsi="http://www.w3.org/2001/XMLSchema-instance" xmlns:pc="http://schemas.microsoft.com/office/infopath/2007/PartnerControls">
+  <documentManagement/>
+</p:properties>
+</file>
+
 <file path=customXml/itemProps1.xml><?xml version="1.0" encoding="utf-8"?>
 <ds:datastoreItem xmlns:ds="http://schemas.openxmlformats.org/officeDocument/2006/customXml" ds:itemID="{4CFC1EEA-B388-4EBC-805D-C0D321BA1571}">
   <ds:schemaRefs>
@@ -15254,6 +15283,10 @@
 </file>
 
 <file path=customXml/itemProps2.xml><?xml version="1.0" encoding="utf-8"?>
+<ds:datastoreItem xmlns:ds="http://schemas.openxmlformats.org/officeDocument/2006/customXml" ds:itemID="{A3967E37-BF1D-45A6-940B-BBCA2F21DE76}"/>
+</file>
+
+<file path=customXml/itemProps3.xml><?xml version="1.0" encoding="utf-8"?>
 <ds:datastoreItem xmlns:ds="http://schemas.openxmlformats.org/officeDocument/2006/customXml" ds:itemID="{3BBD4E3F-366D-4C21-B678-CD16BECA3845}">
   <ds:schemaRefs>
     <ds:schemaRef ds:uri="http://purl.org/dc/elements/1.1/"/>
@@ -15267,8 +15300,4 @@
     <ds:schemaRef ds:uri="http://www.w3.org/XML/1998/namespace"/>
   </ds:schemaRefs>
 </ds:datastoreItem>
-</file>
-
-<file path=customXml/itemProps3.xml><?xml version="1.0" encoding="utf-8"?>
-<ds:datastoreItem xmlns:ds="http://schemas.openxmlformats.org/officeDocument/2006/customXml" ds:itemID="{56068FD3-7B66-4BFE-91DA-4DB8B4DD78F6}"/>
 </file>
--- a/semaine_09/420905_semaine9.pptx
+++ b/semaine_09/420905_semaine9.pptx
@@ -10394,10 +10394,10 @@
       </p:sp>
       <p:pic>
         <p:nvPicPr>
-          <p:cNvPr id="5" name="Image 4">
-            <a:extLst>
-              <a:ext uri="{FF2B5EF4-FFF2-40B4-BE49-F238E27FC236}">
-                <a16:creationId xmlns:a16="http://schemas.microsoft.com/office/drawing/2014/main" id="{AE5521A9-900D-419D-9A14-C30CB2A9E5F5}"/>
+          <p:cNvPr id="7" name="Image 6">
+            <a:extLst>
+              <a:ext uri="{FF2B5EF4-FFF2-40B4-BE49-F238E27FC236}">
+                <a16:creationId xmlns:a16="http://schemas.microsoft.com/office/drawing/2014/main" id="{2BD9CC4B-F70B-4791-8628-87B6D27267CF}"/>
               </a:ext>
             </a:extLst>
           </p:cNvPr>
@@ -10414,8 +10414,8 @@
         </p:blipFill>
         <p:spPr>
           <a:xfrm>
-            <a:off x="2201736" y="2126644"/>
-            <a:ext cx="7788528" cy="1098858"/>
+            <a:off x="911143" y="4154753"/>
+            <a:ext cx="10440857" cy="743054"/>
           </a:xfrm>
           <a:prstGeom prst="rect">
             <a:avLst/>
@@ -10429,10 +10429,10 @@
       </p:pic>
       <p:pic>
         <p:nvPicPr>
-          <p:cNvPr id="7" name="Image 6">
-            <a:extLst>
-              <a:ext uri="{FF2B5EF4-FFF2-40B4-BE49-F238E27FC236}">
-                <a16:creationId xmlns:a16="http://schemas.microsoft.com/office/drawing/2014/main" id="{2BD9CC4B-F70B-4791-8628-87B6D27267CF}"/>
+          <p:cNvPr id="9" name="Image 8">
+            <a:extLst>
+              <a:ext uri="{FF2B5EF4-FFF2-40B4-BE49-F238E27FC236}">
+                <a16:creationId xmlns:a16="http://schemas.microsoft.com/office/drawing/2014/main" id="{623069F7-1BDB-4B1D-9409-08D7D02E5B24}"/>
               </a:ext>
             </a:extLst>
           </p:cNvPr>
@@ -10449,8 +10449,8 @@
         </p:blipFill>
         <p:spPr>
           <a:xfrm>
-            <a:off x="911143" y="4154753"/>
-            <a:ext cx="10440857" cy="743054"/>
+            <a:off x="2071126" y="5759683"/>
+            <a:ext cx="8049748" cy="800212"/>
           </a:xfrm>
           <a:prstGeom prst="rect">
             <a:avLst/>
@@ -10462,12 +10462,156 @@
           </a:ln>
         </p:spPr>
       </p:pic>
+      <p:sp>
+        <p:nvSpPr>
+          <p:cNvPr id="11" name="Bulle narrative : rectangle à coins arrondis 10">
+            <a:extLst>
+              <a:ext uri="{FF2B5EF4-FFF2-40B4-BE49-F238E27FC236}">
+                <a16:creationId xmlns:a16="http://schemas.microsoft.com/office/drawing/2014/main" id="{6E3587FD-F466-491F-89B0-112FE75EA1AE}"/>
+              </a:ext>
+            </a:extLst>
+          </p:cNvPr>
+          <p:cNvSpPr/>
+          <p:nvPr/>
+        </p:nvSpPr>
+        <p:spPr>
+          <a:xfrm>
+            <a:off x="9418320" y="959128"/>
+            <a:ext cx="2621280" cy="736578"/>
+          </a:xfrm>
+          <a:prstGeom prst="wedgeRoundRectCallout">
+            <a:avLst>
+              <a:gd name="adj1" fmla="val -33465"/>
+              <a:gd name="adj2" fmla="val 75572"/>
+              <a:gd name="adj3" fmla="val 16667"/>
+            </a:avLst>
+          </a:prstGeom>
+          <a:noFill/>
+          <a:ln>
+            <a:solidFill>
+              <a:srgbClr val="7385D1"/>
+            </a:solidFill>
+          </a:ln>
+        </p:spPr>
+        <p:style>
+          <a:lnRef idx="2">
+            <a:schemeClr val="accent1">
+              <a:shade val="50000"/>
+            </a:schemeClr>
+          </a:lnRef>
+          <a:fillRef idx="1">
+            <a:schemeClr val="accent1"/>
+          </a:fillRef>
+          <a:effectRef idx="0">
+            <a:schemeClr val="accent1"/>
+          </a:effectRef>
+          <a:fontRef idx="minor">
+            <a:schemeClr val="lt1"/>
+          </a:fontRef>
+        </p:style>
+        <p:txBody>
+          <a:bodyPr rtlCol="0" anchor="ctr"/>
+          <a:lstStyle/>
+          <a:p>
+            <a:r>
+              <a:rPr lang="fr-CA">
+                <a:solidFill>
+                  <a:srgbClr val="7385D1"/>
+                </a:solidFill>
+              </a:rPr>
+              <a:t>Utilisez la méthode que vous préférez !</a:t>
+            </a:r>
+          </a:p>
+        </p:txBody>
+      </p:sp>
+      <p:cxnSp>
+        <p:nvCxnSpPr>
+          <p:cNvPr id="14" name="Connecteur droit 13">
+            <a:extLst>
+              <a:ext uri="{FF2B5EF4-FFF2-40B4-BE49-F238E27FC236}">
+                <a16:creationId xmlns:a16="http://schemas.microsoft.com/office/drawing/2014/main" id="{F3DCF2DD-C5E7-4761-A6B2-3A711CA27179}"/>
+              </a:ext>
+            </a:extLst>
+          </p:cNvPr>
+          <p:cNvCxnSpPr/>
+          <p:nvPr/>
+        </p:nvCxnSpPr>
+        <p:spPr>
+          <a:xfrm>
+            <a:off x="872976" y="3453384"/>
+            <a:ext cx="10479024" cy="0"/>
+          </a:xfrm>
+          <a:prstGeom prst="line">
+            <a:avLst/>
+          </a:prstGeom>
+          <a:ln w="12700">
+            <a:solidFill>
+              <a:srgbClr val="7385D1"/>
+            </a:solidFill>
+          </a:ln>
+        </p:spPr>
+        <p:style>
+          <a:lnRef idx="1">
+            <a:schemeClr val="accent1"/>
+          </a:lnRef>
+          <a:fillRef idx="0">
+            <a:schemeClr val="accent1"/>
+          </a:fillRef>
+          <a:effectRef idx="0">
+            <a:schemeClr val="accent1"/>
+          </a:effectRef>
+          <a:fontRef idx="minor">
+            <a:schemeClr val="tx1"/>
+          </a:fontRef>
+        </p:style>
+      </p:cxnSp>
+      <p:cxnSp>
+        <p:nvCxnSpPr>
+          <p:cNvPr id="15" name="Connecteur droit 14">
+            <a:extLst>
+              <a:ext uri="{FF2B5EF4-FFF2-40B4-BE49-F238E27FC236}">
+                <a16:creationId xmlns:a16="http://schemas.microsoft.com/office/drawing/2014/main" id="{7A0D260D-BAF5-41FE-A307-FD788FCC6043}"/>
+              </a:ext>
+            </a:extLst>
+          </p:cNvPr>
+          <p:cNvCxnSpPr/>
+          <p:nvPr/>
+        </p:nvCxnSpPr>
+        <p:spPr>
+          <a:xfrm>
+            <a:off x="872976" y="5063257"/>
+            <a:ext cx="10479024" cy="0"/>
+          </a:xfrm>
+          <a:prstGeom prst="line">
+            <a:avLst/>
+          </a:prstGeom>
+          <a:ln w="12700">
+            <a:solidFill>
+              <a:srgbClr val="7385D1"/>
+            </a:solidFill>
+          </a:ln>
+        </p:spPr>
+        <p:style>
+          <a:lnRef idx="1">
+            <a:schemeClr val="accent1"/>
+          </a:lnRef>
+          <a:fillRef idx="0">
+            <a:schemeClr val="accent1"/>
+          </a:fillRef>
+          <a:effectRef idx="0">
+            <a:schemeClr val="accent1"/>
+          </a:effectRef>
+          <a:fontRef idx="minor">
+            <a:schemeClr val="tx1"/>
+          </a:fontRef>
+        </p:style>
+      </p:cxnSp>
       <p:pic>
         <p:nvPicPr>
-          <p:cNvPr id="9" name="Image 8">
-            <a:extLst>
-              <a:ext uri="{FF2B5EF4-FFF2-40B4-BE49-F238E27FC236}">
-                <a16:creationId xmlns:a16="http://schemas.microsoft.com/office/drawing/2014/main" id="{623069F7-1BDB-4B1D-9409-08D7D02E5B24}"/>
+          <p:cNvPr id="6" name="Image 5">
+            <a:extLst>
+              <a:ext uri="{FF2B5EF4-FFF2-40B4-BE49-F238E27FC236}">
+                <a16:creationId xmlns:a16="http://schemas.microsoft.com/office/drawing/2014/main" id="{C60A362B-B238-41B1-9781-C3A7B46E6078}"/>
               </a:ext>
             </a:extLst>
           </p:cNvPr>
@@ -10484,8 +10628,8 @@
         </p:blipFill>
         <p:spPr>
           <a:xfrm>
-            <a:off x="2071126" y="5759683"/>
-            <a:ext cx="8049748" cy="800212"/>
+            <a:off x="1919899" y="2064274"/>
+            <a:ext cx="8352201" cy="1158216"/>
           </a:xfrm>
           <a:prstGeom prst="rect">
             <a:avLst/>
@@ -10497,150 +10641,6 @@
           </a:ln>
         </p:spPr>
       </p:pic>
-      <p:sp>
-        <p:nvSpPr>
-          <p:cNvPr id="11" name="Bulle narrative : rectangle à coins arrondis 10">
-            <a:extLst>
-              <a:ext uri="{FF2B5EF4-FFF2-40B4-BE49-F238E27FC236}">
-                <a16:creationId xmlns:a16="http://schemas.microsoft.com/office/drawing/2014/main" id="{6E3587FD-F466-491F-89B0-112FE75EA1AE}"/>
-              </a:ext>
-            </a:extLst>
-          </p:cNvPr>
-          <p:cNvSpPr/>
-          <p:nvPr/>
-        </p:nvSpPr>
-        <p:spPr>
-          <a:xfrm>
-            <a:off x="9418320" y="959128"/>
-            <a:ext cx="2621280" cy="736578"/>
-          </a:xfrm>
-          <a:prstGeom prst="wedgeRoundRectCallout">
-            <a:avLst>
-              <a:gd name="adj1" fmla="val -33465"/>
-              <a:gd name="adj2" fmla="val 75572"/>
-              <a:gd name="adj3" fmla="val 16667"/>
-            </a:avLst>
-          </a:prstGeom>
-          <a:noFill/>
-          <a:ln>
-            <a:solidFill>
-              <a:srgbClr val="7385D1"/>
-            </a:solidFill>
-          </a:ln>
-        </p:spPr>
-        <p:style>
-          <a:lnRef idx="2">
-            <a:schemeClr val="accent1">
-              <a:shade val="50000"/>
-            </a:schemeClr>
-          </a:lnRef>
-          <a:fillRef idx="1">
-            <a:schemeClr val="accent1"/>
-          </a:fillRef>
-          <a:effectRef idx="0">
-            <a:schemeClr val="accent1"/>
-          </a:effectRef>
-          <a:fontRef idx="minor">
-            <a:schemeClr val="lt1"/>
-          </a:fontRef>
-        </p:style>
-        <p:txBody>
-          <a:bodyPr rtlCol="0" anchor="ctr"/>
-          <a:lstStyle/>
-          <a:p>
-            <a:r>
-              <a:rPr lang="fr-CA">
-                <a:solidFill>
-                  <a:srgbClr val="7385D1"/>
-                </a:solidFill>
-              </a:rPr>
-              <a:t>Utilisez la méthode que vous préférez !</a:t>
-            </a:r>
-          </a:p>
-        </p:txBody>
-      </p:sp>
-      <p:cxnSp>
-        <p:nvCxnSpPr>
-          <p:cNvPr id="14" name="Connecteur droit 13">
-            <a:extLst>
-              <a:ext uri="{FF2B5EF4-FFF2-40B4-BE49-F238E27FC236}">
-                <a16:creationId xmlns:a16="http://schemas.microsoft.com/office/drawing/2014/main" id="{F3DCF2DD-C5E7-4761-A6B2-3A711CA27179}"/>
-              </a:ext>
-            </a:extLst>
-          </p:cNvPr>
-          <p:cNvCxnSpPr/>
-          <p:nvPr/>
-        </p:nvCxnSpPr>
-        <p:spPr>
-          <a:xfrm>
-            <a:off x="872976" y="3453384"/>
-            <a:ext cx="10479024" cy="0"/>
-          </a:xfrm>
-          <a:prstGeom prst="line">
-            <a:avLst/>
-          </a:prstGeom>
-          <a:ln w="12700">
-            <a:solidFill>
-              <a:srgbClr val="7385D1"/>
-            </a:solidFill>
-          </a:ln>
-        </p:spPr>
-        <p:style>
-          <a:lnRef idx="1">
-            <a:schemeClr val="accent1"/>
-          </a:lnRef>
-          <a:fillRef idx="0">
-            <a:schemeClr val="accent1"/>
-          </a:fillRef>
-          <a:effectRef idx="0">
-            <a:schemeClr val="accent1"/>
-          </a:effectRef>
-          <a:fontRef idx="minor">
-            <a:schemeClr val="tx1"/>
-          </a:fontRef>
-        </p:style>
-      </p:cxnSp>
-      <p:cxnSp>
-        <p:nvCxnSpPr>
-          <p:cNvPr id="15" name="Connecteur droit 14">
-            <a:extLst>
-              <a:ext uri="{FF2B5EF4-FFF2-40B4-BE49-F238E27FC236}">
-                <a16:creationId xmlns:a16="http://schemas.microsoft.com/office/drawing/2014/main" id="{7A0D260D-BAF5-41FE-A307-FD788FCC6043}"/>
-              </a:ext>
-            </a:extLst>
-          </p:cNvPr>
-          <p:cNvCxnSpPr/>
-          <p:nvPr/>
-        </p:nvCxnSpPr>
-        <p:spPr>
-          <a:xfrm>
-            <a:off x="872976" y="5063257"/>
-            <a:ext cx="10479024" cy="0"/>
-          </a:xfrm>
-          <a:prstGeom prst="line">
-            <a:avLst/>
-          </a:prstGeom>
-          <a:ln w="12700">
-            <a:solidFill>
-              <a:srgbClr val="7385D1"/>
-            </a:solidFill>
-          </a:ln>
-        </p:spPr>
-        <p:style>
-          <a:lnRef idx="1">
-            <a:schemeClr val="accent1"/>
-          </a:lnRef>
-          <a:fillRef idx="0">
-            <a:schemeClr val="accent1"/>
-          </a:fillRef>
-          <a:effectRef idx="0">
-            <a:schemeClr val="accent1"/>
-          </a:effectRef>
-          <a:fontRef idx="minor">
-            <a:schemeClr val="tx1"/>
-          </a:fontRef>
-        </p:style>
-      </p:cxnSp>
     </p:spTree>
     <p:extLst>
       <p:ext uri="{BB962C8B-B14F-4D97-AF65-F5344CB8AC3E}">
@@ -15091,6 +15091,12 @@
 </file>
 
 <file path=customXml/item2.xml><?xml version="1.0" encoding="utf-8"?>
+<p:properties xmlns:p="http://schemas.microsoft.com/office/2006/metadata/properties" xmlns:xsi="http://www.w3.org/2001/XMLSchema-instance" xmlns:pc="http://schemas.microsoft.com/office/infopath/2007/PartnerControls">
+  <documentManagement/>
+</p:properties>
+</file>
+
+<file path=customXml/item3.xml><?xml version="1.0" encoding="utf-8"?>
 <ct:contentTypeSchema xmlns:ct="http://schemas.microsoft.com/office/2006/metadata/contentType" xmlns:ma="http://schemas.microsoft.com/office/2006/metadata/properties/metaAttributes" ct:_="" ma:_="" ma:contentTypeName="Document" ma:contentTypeID="0x01010062E8CCA7FB9EAE4D9797B5C1381037FC" ma:contentTypeVersion="9" ma:contentTypeDescription="Create a new document." ma:contentTypeScope="" ma:versionID="020e06b287671e86e91b3e1b12ab4816">
   <xsd:schema xmlns:xsd="http://www.w3.org/2001/XMLSchema" xmlns:xs="http://www.w3.org/2001/XMLSchema" xmlns:p="http://schemas.microsoft.com/office/2006/metadata/properties" xmlns:ns2="83ab252c-4429-4d3c-b354-a26bac7f17c4" targetNamespace="http://schemas.microsoft.com/office/2006/metadata/properties" ma:root="true" ma:fieldsID="a7531f0ded98428dc5aa0cd72d251711" ns2:_="">
     <xsd:import namespace="83ab252c-4429-4d3c-b354-a26bac7f17c4"/>
@@ -15268,12 +15274,6 @@
 </ct:contentTypeSchema>
 </file>
 
-<file path=customXml/item3.xml><?xml version="1.0" encoding="utf-8"?>
-<p:properties xmlns:p="http://schemas.microsoft.com/office/2006/metadata/properties" xmlns:xsi="http://www.w3.org/2001/XMLSchema-instance" xmlns:pc="http://schemas.microsoft.com/office/infopath/2007/PartnerControls">
-  <documentManagement/>
-</p:properties>
-</file>
-
 <file path=customXml/itemProps1.xml><?xml version="1.0" encoding="utf-8"?>
 <ds:datastoreItem xmlns:ds="http://schemas.openxmlformats.org/officeDocument/2006/customXml" ds:itemID="{4CFC1EEA-B388-4EBC-805D-C0D321BA1571}">
   <ds:schemaRefs>
@@ -15283,10 +15283,6 @@
 </file>
 
 <file path=customXml/itemProps2.xml><?xml version="1.0" encoding="utf-8"?>
-<ds:datastoreItem xmlns:ds="http://schemas.openxmlformats.org/officeDocument/2006/customXml" ds:itemID="{A3967E37-BF1D-45A6-940B-BBCA2F21DE76}"/>
-</file>
-
-<file path=customXml/itemProps3.xml><?xml version="1.0" encoding="utf-8"?>
 <ds:datastoreItem xmlns:ds="http://schemas.openxmlformats.org/officeDocument/2006/customXml" ds:itemID="{3BBD4E3F-366D-4C21-B678-CD16BECA3845}">
   <ds:schemaRefs>
     <ds:schemaRef ds:uri="http://purl.org/dc/elements/1.1/"/>
@@ -15300,4 +15296,8 @@
     <ds:schemaRef ds:uri="http://www.w3.org/XML/1998/namespace"/>
   </ds:schemaRefs>
 </ds:datastoreItem>
+</file>
+
+<file path=customXml/itemProps3.xml><?xml version="1.0" encoding="utf-8"?>
+<ds:datastoreItem xmlns:ds="http://schemas.openxmlformats.org/officeDocument/2006/customXml" ds:itemID="{155CF1C4-8757-405A-83E5-4A52061A9378}"/>
 </file>